--- a/Courses/145060/units/unit-05-collections-files-real-data/04-slides/exports/MCCTC_145060_Slides_W11_ResponsibleScraping.pptx
+++ b/Courses/145060/units/unit-05-collections-files-real-data/04-slides/exports/MCCTC_145060_Slides_W11_ResponsibleScraping.pptx
@@ -28,16 +28,12 @@
       <p:regular r:id="rId201314"/>
     </p:embeddedFont>
     <p:embeddedFont>
-      <p:font typeface="Orbitron"/>
+      <p:font typeface="Roboto Condensed Bold"/>
       <p:regular r:id="rId201315"/>
     </p:embeddedFont>
     <p:embeddedFont>
-      <p:font typeface="Roboto Condensed Bold"/>
+      <p:font typeface="Roboto Condensed"/>
       <p:regular r:id="rId201316"/>
-    </p:embeddedFont>
-    <p:embeddedFont>
-      <p:font typeface="Roboto Condensed"/>
-      <p:regular r:id="rId201317"/>
     </p:embeddedFont>
   </p:embeddedFontLst>
   <p:defaultTextStyle>
@@ -706,7 +702,7 @@
           <a:p>
             <a:r>
               <a:rPr lang="en-US" dirty="0"/>
-              <a:t>Build one is the Swap Shelf Scraper lab. You start the club's website on your own computer, read its robots dot txt and terms, collect all three pages with a two second wait, and write the listings to a CSV. Step seven has you remove the wait on purpose and record the 429. Nobody in this class scrapes a real website for this lab. Build two is the ingest stage of your data pipeline.</a:t>
+              <a:t>Build one is the Swap Shelf Scraper lab. You start the club's website on your own computer, read its robots dot txt and terms, collect all three pages with a two second wait, and write the listings to a CSV. Step seven has you remove the wait on purpose and record the 429. Nobody in this class scrapes a real website for this lab. Keep the shelf dot CSV file your scraper writes. Build two opens the data pipeline project. Choose your route, write down every kind of mess in the data before any code, and read both sources into lists of dictionaries.</a:t>
             </a:r>
             <a:endParaRPr lang="en-US" dirty="0"/>
           </a:p>
@@ -1951,7 +1947,7 @@
         </p:blipFill>
         <p:spPr>
           <a:xfrm>
-            <a:off x="7619809" y="0"/>
+            <a:off x="0" y="0"/>
             <a:ext cx="4571886" cy="6858000"/>
           </a:xfrm>
           <a:prstGeom prst="rect">
@@ -1967,7 +1963,7 @@
         </p:nvSpPr>
         <p:spPr>
           <a:xfrm>
-            <a:off x="661475" y="1635919"/>
+            <a:off x="5233360" y="1635919"/>
             <a:ext cx="6296860" cy="1771948"/>
           </a:xfrm>
           <a:prstGeom prst="rect">
@@ -2011,7 +2007,7 @@
         </p:nvSpPr>
         <p:spPr>
           <a:xfrm>
-            <a:off x="661475" y="3691334"/>
+            <a:off x="5233360" y="3691334"/>
             <a:ext cx="6296860" cy="1407914"/>
           </a:xfrm>
           <a:prstGeom prst="rect">
@@ -2119,7 +2115,7 @@
         </p:nvSpPr>
         <p:spPr>
           <a:xfrm>
-            <a:off x="132255" y="6457255"/>
+            <a:off x="4704141" y="6457255"/>
             <a:ext cx="3640642" cy="158750"/>
           </a:xfrm>
           <a:prstGeom prst="rect">
@@ -2186,7 +2182,7 @@
         </p:nvSpPr>
         <p:spPr>
           <a:xfrm>
-            <a:off x="661475" y="1615380"/>
+            <a:off x="661475" y="1081782"/>
             <a:ext cx="10868745" cy="590649"/>
           </a:xfrm>
           <a:prstGeom prst="rect">
@@ -2220,16 +2216,46 @@
           </a:p>
         </p:txBody>
       </p:sp>
-      <p:sp>
-        <p:nvSpPr>
-          <p:cNvPr id="3" name="Text 1"/>
-          <p:cNvSpPr/>
-          <p:nvPr/>
-        </p:nvSpPr>
-        <p:spPr>
-          <a:xfrm>
-            <a:off x="661475" y="2584053"/>
-            <a:ext cx="378014" cy="236240"/>
+      <p:pic>
+        <p:nvPicPr>
+          <p:cNvPr id="3" name="Image 0" descr="preencoded.png">    </p:cNvPr>
+          <p:cNvPicPr>
+            <a:picLocks noChangeAspect="1"/>
+          </p:cNvPicPr>
+          <p:nvPr/>
+        </p:nvPicPr>
+        <p:blipFill>
+          <a:blip r:embed="rId1">
+            <a:extLst>
+              <a:ext uri="{96DAC541-7B7A-43D3-8B79-37D633B846F1}">
+                <asvg:svgBlip xmlns:asvg="http://schemas.microsoft.com/office/drawing/2016/SVG/main" r:embed="rId2"/>
+              </a:ext>
+            </a:extLst>
+          </a:blip>
+          <a:stretch>
+            <a:fillRect/>
+          </a:stretch>
+        </p:blipFill>
+        <p:spPr>
+          <a:xfrm>
+            <a:off x="661475" y="2050455"/>
+            <a:ext cx="5339820" cy="1706959"/>
+          </a:xfrm>
+          <a:prstGeom prst="rect">
+            <a:avLst/>
+          </a:prstGeom>
+        </p:spPr>
+      </p:pic>
+      <p:sp>
+        <p:nvSpPr>
+          <p:cNvPr id="4" name="Text 1"/>
+          <p:cNvSpPr/>
+          <p:nvPr/>
+        </p:nvSpPr>
+        <p:spPr>
+          <a:xfrm>
+            <a:off x="3189605" y="2172593"/>
+            <a:ext cx="283461" cy="354409"/>
           </a:xfrm>
           <a:prstGeom prst="rect">
             <a:avLst/>
@@ -2241,78 +2267,14 @@
           <a:bodyPr wrap="none" lIns="0" tIns="0" rIns="0" bIns="0" rtlCol="0" anchor="ctr"/>
           <a:lstStyle/>
           <a:p>
-            <a:pPr algn="l" indent="0" marL="0">
+            <a:pPr algn="ctr" indent="0" marL="0">
               <a:lnSpc>
                 <a:spcPct val="100000"/>
               </a:lnSpc>
               <a:buNone/>
             </a:pPr>
             <a:r>
-              <a:rPr lang="en-US" sz="1450" dirty="0">
-                <a:solidFill>
-                  <a:srgbClr val="1C1C1C"/>
-                </a:solidFill>
-                <a:latin typeface="Orbitron" pitchFamily="34" charset="0"/>
-                <a:ea typeface="Orbitron" pitchFamily="34" charset="-122"/>
-                <a:cs typeface="Orbitron" pitchFamily="34" charset="-120"/>
-              </a:rPr>
-              <a:t>01</a:t>
-            </a:r>
-            <a:endParaRPr lang="en-US" sz="1450" dirty="0"/>
-          </a:p>
-        </p:txBody>
-      </p:sp>
-      <p:sp>
-        <p:nvSpPr>
-          <p:cNvPr id="4" name="Shape 2"/>
-          <p:cNvSpPr/>
-          <p:nvPr/>
-        </p:nvSpPr>
-        <p:spPr>
-          <a:xfrm>
-            <a:off x="661475" y="2879923"/>
-            <a:ext cx="5339820" cy="25400"/>
-          </a:xfrm>
-          <a:prstGeom prst="rect">
-            <a:avLst/>
-          </a:prstGeom>
-          <a:solidFill>
-            <a:srgbClr val="57A1EB"/>
-          </a:solidFill>
-          <a:ln/>
-        </p:spPr>
-      </p:sp>
-      <p:sp>
-        <p:nvSpPr>
-          <p:cNvPr id="5" name="Text 3"/>
-          <p:cNvSpPr/>
-          <p:nvPr/>
-        </p:nvSpPr>
-        <p:spPr>
-          <a:xfrm>
-            <a:off x="661475" y="3025180"/>
-            <a:ext cx="5339820" cy="590550"/>
-          </a:xfrm>
-          <a:prstGeom prst="rect">
-            <a:avLst/>
-          </a:prstGeom>
-          <a:noFill/>
-          <a:ln/>
-        </p:spPr>
-        <p:txBody>
-          <a:bodyPr wrap="square" lIns="0" tIns="0" rIns="0" bIns="0" rtlCol="0" anchor="t">
-            <a:normAutofit/>
-          </a:bodyPr>
-          <a:lstStyle/>
-          <a:p>
-            <a:pPr algn="l" indent="0" marL="0">
-              <a:lnSpc>
-                <a:spcPct val="104000"/>
-              </a:lnSpc>
-              <a:buNone/>
-            </a:pPr>
-            <a:r>
-              <a:rPr lang="en-US" sz="1850" b="1" dirty="0">
+              <a:rPr lang="en-US" sz="2200" b="1" dirty="0">
                 <a:solidFill>
                   <a:srgbClr val="1C1C1C"/>
                 </a:solidFill>
@@ -2320,84 +2282,22 @@
                 <a:ea typeface="Orbitron Bold" pitchFamily="34" charset="-122"/>
                 <a:cs typeface="Orbitron Bold" pitchFamily="34" charset="-120"/>
               </a:rPr>
-              <a:t>Lab U5-05: scrape the Swap Shelf, politely</a:t>
-            </a:r>
-            <a:endParaRPr lang="en-US" sz="1850" dirty="0"/>
-          </a:p>
-        </p:txBody>
-      </p:sp>
-      <p:sp>
-        <p:nvSpPr>
-          <p:cNvPr id="6" name="Text 4"/>
-          <p:cNvSpPr/>
-          <p:nvPr/>
-        </p:nvSpPr>
-        <p:spPr>
-          <a:xfrm>
-            <a:off x="6190301" y="2584053"/>
-            <a:ext cx="378014" cy="236240"/>
-          </a:xfrm>
-          <a:prstGeom prst="rect">
-            <a:avLst/>
-          </a:prstGeom>
-          <a:noFill/>
-          <a:ln/>
-        </p:spPr>
-        <p:txBody>
-          <a:bodyPr wrap="none" lIns="0" tIns="0" rIns="0" bIns="0" rtlCol="0" anchor="ctr"/>
-          <a:lstStyle/>
-          <a:p>
-            <a:pPr algn="l" indent="0" marL="0">
-              <a:lnSpc>
-                <a:spcPct val="100000"/>
-              </a:lnSpc>
-              <a:buNone/>
-            </a:pPr>
-            <a:r>
-              <a:rPr lang="en-US" sz="1450" dirty="0">
-                <a:solidFill>
-                  <a:srgbClr val="1C1C1C"/>
-                </a:solidFill>
-                <a:latin typeface="Orbitron" pitchFamily="34" charset="0"/>
-                <a:ea typeface="Orbitron" pitchFamily="34" charset="-122"/>
-                <a:cs typeface="Orbitron" pitchFamily="34" charset="-120"/>
-              </a:rPr>
-              <a:t>02</a:t>
-            </a:r>
-            <a:endParaRPr lang="en-US" sz="1450" dirty="0"/>
-          </a:p>
-        </p:txBody>
-      </p:sp>
-      <p:sp>
-        <p:nvSpPr>
-          <p:cNvPr id="7" name="Shape 5"/>
-          <p:cNvSpPr/>
-          <p:nvPr/>
-        </p:nvSpPr>
-        <p:spPr>
-          <a:xfrm>
-            <a:off x="6190301" y="2879923"/>
-            <a:ext cx="5339919" cy="25400"/>
-          </a:xfrm>
-          <a:prstGeom prst="rect">
-            <a:avLst/>
-          </a:prstGeom>
-          <a:solidFill>
-            <a:srgbClr val="57A1EB"/>
-          </a:solidFill>
-          <a:ln/>
-        </p:spPr>
-      </p:sp>
-      <p:sp>
-        <p:nvSpPr>
-          <p:cNvPr id="8" name="Text 6"/>
-          <p:cNvSpPr/>
-          <p:nvPr/>
-        </p:nvSpPr>
-        <p:spPr>
-          <a:xfrm>
-            <a:off x="6190301" y="3025180"/>
-            <a:ext cx="5339919" cy="295275"/>
+              <a:t>1</a:t>
+            </a:r>
+            <a:endParaRPr lang="en-US" sz="2200" dirty="0"/>
+          </a:p>
+        </p:txBody>
+      </p:sp>
+      <p:sp>
+        <p:nvSpPr>
+          <p:cNvPr id="5" name="Text 2"/>
+          <p:cNvSpPr/>
+          <p:nvPr/>
+        </p:nvSpPr>
+        <p:spPr>
+          <a:xfrm>
+            <a:off x="875881" y="2831902"/>
+            <a:ext cx="4911007" cy="295275"/>
           </a:xfrm>
           <a:prstGeom prst="rect">
             <a:avLst/>
@@ -2424,7 +2324,7 @@
                 <a:ea typeface="Orbitron Bold" pitchFamily="34" charset="-122"/>
                 <a:cs typeface="Orbitron Bold" pitchFamily="34" charset="-120"/>
               </a:rPr>
-              <a:t>Run the site yourself in its own terminal</a:t>
+              <a:t>Lab U5-05</a:t>
             </a:r>
             <a:endParaRPr lang="en-US" sz="1850" dirty="0"/>
           </a:p>
@@ -2432,14 +2332,14 @@
       </p:sp>
       <p:sp>
         <p:nvSpPr>
-          <p:cNvPr id="9" name="Text 7"/>
-          <p:cNvSpPr/>
-          <p:nvPr/>
-        </p:nvSpPr>
-        <p:spPr>
-          <a:xfrm>
-            <a:off x="661475" y="3946426"/>
-            <a:ext cx="378014" cy="236240"/>
+          <p:cNvPr id="6" name="Text 3"/>
+          <p:cNvSpPr/>
+          <p:nvPr/>
+        </p:nvSpPr>
+        <p:spPr>
+          <a:xfrm>
+            <a:off x="875881" y="3240584"/>
+            <a:ext cx="4911007" cy="302419"/>
           </a:xfrm>
           <a:prstGeom prst="rect">
             <a:avLst/>
@@ -2448,81 +2348,89 @@
           <a:ln/>
         </p:spPr>
         <p:txBody>
+          <a:bodyPr wrap="none" lIns="0" tIns="0" rIns="0" bIns="0" rtlCol="0" anchor="t"/>
+          <a:lstStyle/>
+          <a:p>
+            <a:pPr algn="l" indent="0" marL="0">
+              <a:lnSpc>
+                <a:spcPct val="133000"/>
+              </a:lnSpc>
+              <a:buNone/>
+            </a:pPr>
+            <a:r>
+              <a:rPr lang="en-US" sz="1450" dirty="0">
+                <a:solidFill>
+                  <a:srgbClr val="1C1C1C"/>
+                </a:solidFill>
+                <a:latin typeface="Roboto Condensed" pitchFamily="34" charset="0"/>
+                <a:ea typeface="Roboto Condensed" pitchFamily="34" charset="-122"/>
+                <a:cs typeface="Roboto Condensed" pitchFamily="34" charset="-120"/>
+              </a:rPr>
+              <a:t>Scrape the Swap Shelf, politely</a:t>
+            </a:r>
+            <a:endParaRPr lang="en-US" sz="1450" dirty="0"/>
+          </a:p>
+        </p:txBody>
+      </p:sp>
+      <p:pic>
+        <p:nvPicPr>
+          <p:cNvPr id="7" name="Image 1" descr="preencoded.png">    </p:cNvPr>
+          <p:cNvPicPr>
+            <a:picLocks noChangeAspect="1"/>
+          </p:cNvPicPr>
+          <p:nvPr/>
+        </p:nvPicPr>
+        <p:blipFill>
+          <a:blip r:embed="rId3">
+            <a:extLst>
+              <a:ext uri="{96DAC541-7B7A-43D3-8B79-37D633B846F1}">
+                <asvg:svgBlip xmlns:asvg="http://schemas.microsoft.com/office/drawing/2016/SVG/main" r:embed="rId4"/>
+              </a:ext>
+            </a:extLst>
+          </a:blip>
+          <a:stretch>
+            <a:fillRect/>
+          </a:stretch>
+        </p:blipFill>
+        <p:spPr>
+          <a:xfrm>
+            <a:off x="6190301" y="2050455"/>
+            <a:ext cx="5339919" cy="1706959"/>
+          </a:xfrm>
+          <a:prstGeom prst="rect">
+            <a:avLst/>
+          </a:prstGeom>
+        </p:spPr>
+      </p:pic>
+      <p:sp>
+        <p:nvSpPr>
+          <p:cNvPr id="8" name="Text 4"/>
+          <p:cNvSpPr/>
+          <p:nvPr/>
+        </p:nvSpPr>
+        <p:spPr>
+          <a:xfrm>
+            <a:off x="8718530" y="2172593"/>
+            <a:ext cx="283461" cy="354409"/>
+          </a:xfrm>
+          <a:prstGeom prst="rect">
+            <a:avLst/>
+          </a:prstGeom>
+          <a:noFill/>
+          <a:ln/>
+        </p:spPr>
+        <p:txBody>
           <a:bodyPr wrap="none" lIns="0" tIns="0" rIns="0" bIns="0" rtlCol="0" anchor="ctr"/>
           <a:lstStyle/>
           <a:p>
-            <a:pPr algn="l" indent="0" marL="0">
+            <a:pPr algn="ctr" indent="0" marL="0">
               <a:lnSpc>
                 <a:spcPct val="100000"/>
               </a:lnSpc>
               <a:buNone/>
             </a:pPr>
             <a:r>
-              <a:rPr lang="en-US" sz="1450" dirty="0">
-                <a:solidFill>
-                  <a:srgbClr val="1C1C1C"/>
-                </a:solidFill>
-                <a:latin typeface="Orbitron" pitchFamily="34" charset="0"/>
-                <a:ea typeface="Orbitron" pitchFamily="34" charset="-122"/>
-                <a:cs typeface="Orbitron" pitchFamily="34" charset="-120"/>
-              </a:rPr>
-              <a:t>03</a:t>
-            </a:r>
-            <a:endParaRPr lang="en-US" sz="1450" dirty="0"/>
-          </a:p>
-        </p:txBody>
-      </p:sp>
-      <p:sp>
-        <p:nvSpPr>
-          <p:cNvPr id="10" name="Shape 8"/>
-          <p:cNvSpPr/>
-          <p:nvPr/>
-        </p:nvSpPr>
-        <p:spPr>
-          <a:xfrm>
-            <a:off x="661475" y="4242296"/>
-            <a:ext cx="5339820" cy="25400"/>
-          </a:xfrm>
-          <a:prstGeom prst="rect">
-            <a:avLst/>
-          </a:prstGeom>
-          <a:solidFill>
-            <a:srgbClr val="57A1EB"/>
-          </a:solidFill>
-          <a:ln/>
-        </p:spPr>
-      </p:sp>
-      <p:sp>
-        <p:nvSpPr>
-          <p:cNvPr id="11" name="Text 9"/>
-          <p:cNvSpPr/>
-          <p:nvPr/>
-        </p:nvSpPr>
-        <p:spPr>
-          <a:xfrm>
-            <a:off x="661475" y="4387552"/>
-            <a:ext cx="5339820" cy="590550"/>
-          </a:xfrm>
-          <a:prstGeom prst="rect">
-            <a:avLst/>
-          </a:prstGeom>
-          <a:noFill/>
-          <a:ln/>
-        </p:spPr>
-        <p:txBody>
-          <a:bodyPr wrap="square" lIns="0" tIns="0" rIns="0" bIns="0" rtlCol="0" anchor="t">
-            <a:normAutofit/>
-          </a:bodyPr>
-          <a:lstStyle/>
-          <a:p>
-            <a:pPr algn="l" indent="0" marL="0">
-              <a:lnSpc>
-                <a:spcPct val="104000"/>
-              </a:lnSpc>
-              <a:buNone/>
-            </a:pPr>
-            <a:r>
-              <a:rPr lang="en-US" sz="1850" b="1" dirty="0">
+              <a:rPr lang="en-US" sz="2200" b="1" dirty="0">
                 <a:solidFill>
                   <a:srgbClr val="1C1C1C"/>
                 </a:solidFill>
@@ -2530,22 +2438,22 @@
                 <a:ea typeface="Orbitron Bold" pitchFamily="34" charset="-122"/>
                 <a:cs typeface="Orbitron Bold" pitchFamily="34" charset="-120"/>
               </a:rPr>
-              <a:t>robots.txt, a two-second wait, a User-Agent</a:t>
-            </a:r>
-            <a:endParaRPr lang="en-US" sz="1850" dirty="0"/>
-          </a:p>
-        </p:txBody>
-      </p:sp>
-      <p:sp>
-        <p:nvSpPr>
-          <p:cNvPr id="12" name="Text 10"/>
-          <p:cNvSpPr/>
-          <p:nvPr/>
-        </p:nvSpPr>
-        <p:spPr>
-          <a:xfrm>
-            <a:off x="6190301" y="3946426"/>
-            <a:ext cx="378014" cy="236240"/>
+              <a:t>2</a:t>
+            </a:r>
+            <a:endParaRPr lang="en-US" sz="2200" dirty="0"/>
+          </a:p>
+        </p:txBody>
+      </p:sp>
+      <p:sp>
+        <p:nvSpPr>
+          <p:cNvPr id="9" name="Text 5"/>
+          <p:cNvSpPr/>
+          <p:nvPr/>
+        </p:nvSpPr>
+        <p:spPr>
+          <a:xfrm>
+            <a:off x="6404708" y="2831902"/>
+            <a:ext cx="4911106" cy="295275"/>
           </a:xfrm>
           <a:prstGeom prst="rect">
             <a:avLst/>
@@ -2554,71 +2462,7 @@
           <a:ln/>
         </p:spPr>
         <p:txBody>
-          <a:bodyPr wrap="none" lIns="0" tIns="0" rIns="0" bIns="0" rtlCol="0" anchor="ctr"/>
-          <a:lstStyle/>
-          <a:p>
-            <a:pPr algn="l" indent="0" marL="0">
-              <a:lnSpc>
-                <a:spcPct val="100000"/>
-              </a:lnSpc>
-              <a:buNone/>
-            </a:pPr>
-            <a:r>
-              <a:rPr lang="en-US" sz="1450" dirty="0">
-                <a:solidFill>
-                  <a:srgbClr val="1C1C1C"/>
-                </a:solidFill>
-                <a:latin typeface="Orbitron" pitchFamily="34" charset="0"/>
-                <a:ea typeface="Orbitron" pitchFamily="34" charset="-122"/>
-                <a:cs typeface="Orbitron" pitchFamily="34" charset="-120"/>
-              </a:rPr>
-              <a:t>04</a:t>
-            </a:r>
-            <a:endParaRPr lang="en-US" sz="1450" dirty="0"/>
-          </a:p>
-        </p:txBody>
-      </p:sp>
-      <p:sp>
-        <p:nvSpPr>
-          <p:cNvPr id="13" name="Shape 11"/>
-          <p:cNvSpPr/>
-          <p:nvPr/>
-        </p:nvSpPr>
-        <p:spPr>
-          <a:xfrm>
-            <a:off x="6190301" y="4242296"/>
-            <a:ext cx="5339919" cy="25400"/>
-          </a:xfrm>
-          <a:prstGeom prst="rect">
-            <a:avLst/>
-          </a:prstGeom>
-          <a:solidFill>
-            <a:srgbClr val="57A1EB"/>
-          </a:solidFill>
-          <a:ln/>
-        </p:spPr>
-      </p:sp>
-      <p:sp>
-        <p:nvSpPr>
-          <p:cNvPr id="14" name="Text 12"/>
-          <p:cNvSpPr/>
-          <p:nvPr/>
-        </p:nvSpPr>
-        <p:spPr>
-          <a:xfrm>
-            <a:off x="6190301" y="4387552"/>
-            <a:ext cx="5339919" cy="590550"/>
-          </a:xfrm>
-          <a:prstGeom prst="rect">
-            <a:avLst/>
-          </a:prstGeom>
-          <a:noFill/>
-          <a:ln/>
-        </p:spPr>
-        <p:txBody>
-          <a:bodyPr wrap="square" lIns="0" tIns="0" rIns="0" bIns="0" rtlCol="0" anchor="t">
-            <a:normAutofit/>
-          </a:bodyPr>
+          <a:bodyPr wrap="none" lIns="0" tIns="0" rIns="0" bIns="0" rtlCol="0" anchor="t"/>
           <a:lstStyle/>
           <a:p>
             <a:pPr algn="l" indent="0" marL="0">
@@ -2636,7 +2480,7 @@
                 <a:ea typeface="Orbitron Bold" pitchFamily="34" charset="-122"/>
                 <a:cs typeface="Orbitron Bold" pitchFamily="34" charset="-120"/>
               </a:rPr>
-              <a:t>Build 2: pipeline ingest, from CSV or the site</a:t>
+              <a:t>Run the site</a:t>
             </a:r>
             <a:endParaRPr lang="en-US" sz="1850" dirty="0"/>
           </a:p>
@@ -2644,7 +2488,361 @@
       </p:sp>
       <p:sp>
         <p:nvSpPr>
-          <p:cNvPr id="15" name="Text 13"/>
+          <p:cNvPr id="10" name="Text 6"/>
+          <p:cNvSpPr/>
+          <p:nvPr/>
+        </p:nvSpPr>
+        <p:spPr>
+          <a:xfrm>
+            <a:off x="6404708" y="3240584"/>
+            <a:ext cx="4911106" cy="302419"/>
+          </a:xfrm>
+          <a:prstGeom prst="rect">
+            <a:avLst/>
+          </a:prstGeom>
+          <a:noFill/>
+          <a:ln/>
+        </p:spPr>
+        <p:txBody>
+          <a:bodyPr wrap="none" lIns="0" tIns="0" rIns="0" bIns="0" rtlCol="0" anchor="t"/>
+          <a:lstStyle/>
+          <a:p>
+            <a:pPr algn="l" indent="0" marL="0">
+              <a:lnSpc>
+                <a:spcPct val="133000"/>
+              </a:lnSpc>
+              <a:buNone/>
+            </a:pPr>
+            <a:r>
+              <a:rPr lang="en-US" sz="1450" dirty="0">
+                <a:solidFill>
+                  <a:srgbClr val="1C1C1C"/>
+                </a:solidFill>
+                <a:latin typeface="Roboto Condensed" pitchFamily="34" charset="0"/>
+                <a:ea typeface="Roboto Condensed" pitchFamily="34" charset="-122"/>
+                <a:cs typeface="Roboto Condensed" pitchFamily="34" charset="-120"/>
+              </a:rPr>
+              <a:t>Run the site yourself in its own terminal</a:t>
+            </a:r>
+            <a:endParaRPr lang="en-US" sz="1450" dirty="0"/>
+          </a:p>
+        </p:txBody>
+      </p:sp>
+      <p:pic>
+        <p:nvPicPr>
+          <p:cNvPr id="11" name="Image 2" descr="preencoded.png">    </p:cNvPr>
+          <p:cNvPicPr>
+            <a:picLocks noChangeAspect="1"/>
+          </p:cNvPicPr>
+          <p:nvPr/>
+        </p:nvPicPr>
+        <p:blipFill>
+          <a:blip r:embed="rId5">
+            <a:extLst>
+              <a:ext uri="{96DAC541-7B7A-43D3-8B79-37D633B846F1}">
+                <asvg:svgBlip xmlns:asvg="http://schemas.microsoft.com/office/drawing/2016/SVG/main" r:embed="rId6"/>
+              </a:ext>
+            </a:extLst>
+          </a:blip>
+          <a:stretch>
+            <a:fillRect/>
+          </a:stretch>
+        </p:blipFill>
+        <p:spPr>
+          <a:xfrm>
+            <a:off x="661475" y="3946426"/>
+            <a:ext cx="5339820" cy="1706959"/>
+          </a:xfrm>
+          <a:prstGeom prst="rect">
+            <a:avLst/>
+          </a:prstGeom>
+        </p:spPr>
+      </p:pic>
+      <p:sp>
+        <p:nvSpPr>
+          <p:cNvPr id="12" name="Text 7"/>
+          <p:cNvSpPr/>
+          <p:nvPr/>
+        </p:nvSpPr>
+        <p:spPr>
+          <a:xfrm>
+            <a:off x="3189605" y="4068564"/>
+            <a:ext cx="283461" cy="354409"/>
+          </a:xfrm>
+          <a:prstGeom prst="rect">
+            <a:avLst/>
+          </a:prstGeom>
+          <a:noFill/>
+          <a:ln/>
+        </p:spPr>
+        <p:txBody>
+          <a:bodyPr wrap="none" lIns="0" tIns="0" rIns="0" bIns="0" rtlCol="0" anchor="ctr"/>
+          <a:lstStyle/>
+          <a:p>
+            <a:pPr algn="ctr" indent="0" marL="0">
+              <a:lnSpc>
+                <a:spcPct val="100000"/>
+              </a:lnSpc>
+              <a:buNone/>
+            </a:pPr>
+            <a:r>
+              <a:rPr lang="en-US" sz="2200" b="1" dirty="0">
+                <a:solidFill>
+                  <a:srgbClr val="1C1C1C"/>
+                </a:solidFill>
+                <a:latin typeface="Orbitron Bold" pitchFamily="34" charset="0"/>
+                <a:ea typeface="Orbitron Bold" pitchFamily="34" charset="-122"/>
+                <a:cs typeface="Orbitron Bold" pitchFamily="34" charset="-120"/>
+              </a:rPr>
+              <a:t>3</a:t>
+            </a:r>
+            <a:endParaRPr lang="en-US" sz="2200" dirty="0"/>
+          </a:p>
+        </p:txBody>
+      </p:sp>
+      <p:sp>
+        <p:nvSpPr>
+          <p:cNvPr id="13" name="Text 8"/>
+          <p:cNvSpPr/>
+          <p:nvPr/>
+        </p:nvSpPr>
+        <p:spPr>
+          <a:xfrm>
+            <a:off x="875881" y="4727873"/>
+            <a:ext cx="4911007" cy="295275"/>
+          </a:xfrm>
+          <a:prstGeom prst="rect">
+            <a:avLst/>
+          </a:prstGeom>
+          <a:noFill/>
+          <a:ln/>
+        </p:spPr>
+        <p:txBody>
+          <a:bodyPr wrap="none" lIns="0" tIns="0" rIns="0" bIns="0" rtlCol="0" anchor="t"/>
+          <a:lstStyle/>
+          <a:p>
+            <a:pPr algn="l" indent="0" marL="0">
+              <a:lnSpc>
+                <a:spcPct val="104000"/>
+              </a:lnSpc>
+              <a:buNone/>
+            </a:pPr>
+            <a:r>
+              <a:rPr lang="en-US" sz="1850" b="1" dirty="0">
+                <a:solidFill>
+                  <a:srgbClr val="1C1C1C"/>
+                </a:solidFill>
+                <a:latin typeface="Orbitron Bold" pitchFamily="34" charset="0"/>
+                <a:ea typeface="Orbitron Bold" pitchFamily="34" charset="-122"/>
+                <a:cs typeface="Orbitron Bold" pitchFamily="34" charset="-120"/>
+              </a:rPr>
+              <a:t>Follow the rules</a:t>
+            </a:r>
+            <a:endParaRPr lang="en-US" sz="1850" dirty="0"/>
+          </a:p>
+        </p:txBody>
+      </p:sp>
+      <p:sp>
+        <p:nvSpPr>
+          <p:cNvPr id="14" name="Text 9"/>
+          <p:cNvSpPr/>
+          <p:nvPr/>
+        </p:nvSpPr>
+        <p:spPr>
+          <a:xfrm>
+            <a:off x="875881" y="5136555"/>
+            <a:ext cx="4911007" cy="302419"/>
+          </a:xfrm>
+          <a:prstGeom prst="rect">
+            <a:avLst/>
+          </a:prstGeom>
+          <a:noFill/>
+          <a:ln/>
+        </p:spPr>
+        <p:txBody>
+          <a:bodyPr wrap="none" lIns="0" tIns="0" rIns="0" bIns="0" rtlCol="0" anchor="t"/>
+          <a:lstStyle/>
+          <a:p>
+            <a:pPr algn="l" indent="0" marL="0">
+              <a:lnSpc>
+                <a:spcPct val="133000"/>
+              </a:lnSpc>
+              <a:buNone/>
+            </a:pPr>
+            <a:r>
+              <a:rPr lang="en-US" sz="1450" dirty="0">
+                <a:solidFill>
+                  <a:srgbClr val="1C1C1C"/>
+                </a:solidFill>
+                <a:latin typeface="Roboto Condensed" pitchFamily="34" charset="0"/>
+                <a:ea typeface="Roboto Condensed" pitchFamily="34" charset="-122"/>
+                <a:cs typeface="Roboto Condensed" pitchFamily="34" charset="-120"/>
+              </a:rPr>
+              <a:t>robots.txt, a two-second wait, a User-Agent</a:t>
+            </a:r>
+            <a:endParaRPr lang="en-US" sz="1450" dirty="0"/>
+          </a:p>
+        </p:txBody>
+      </p:sp>
+      <p:pic>
+        <p:nvPicPr>
+          <p:cNvPr id="15" name="Image 3" descr="preencoded.png">    </p:cNvPr>
+          <p:cNvPicPr>
+            <a:picLocks noChangeAspect="1"/>
+          </p:cNvPicPr>
+          <p:nvPr/>
+        </p:nvPicPr>
+        <p:blipFill>
+          <a:blip r:embed="rId7">
+            <a:extLst>
+              <a:ext uri="{96DAC541-7B7A-43D3-8B79-37D633B846F1}">
+                <asvg:svgBlip xmlns:asvg="http://schemas.microsoft.com/office/drawing/2016/SVG/main" r:embed="rId8"/>
+              </a:ext>
+            </a:extLst>
+          </a:blip>
+          <a:stretch>
+            <a:fillRect/>
+          </a:stretch>
+        </p:blipFill>
+        <p:spPr>
+          <a:xfrm>
+            <a:off x="6190301" y="3946426"/>
+            <a:ext cx="5339919" cy="1706959"/>
+          </a:xfrm>
+          <a:prstGeom prst="rect">
+            <a:avLst/>
+          </a:prstGeom>
+        </p:spPr>
+      </p:pic>
+      <p:sp>
+        <p:nvSpPr>
+          <p:cNvPr id="16" name="Text 10"/>
+          <p:cNvSpPr/>
+          <p:nvPr/>
+        </p:nvSpPr>
+        <p:spPr>
+          <a:xfrm>
+            <a:off x="8718530" y="4068564"/>
+            <a:ext cx="283461" cy="354409"/>
+          </a:xfrm>
+          <a:prstGeom prst="rect">
+            <a:avLst/>
+          </a:prstGeom>
+          <a:noFill/>
+          <a:ln/>
+        </p:spPr>
+        <p:txBody>
+          <a:bodyPr wrap="none" lIns="0" tIns="0" rIns="0" bIns="0" rtlCol="0" anchor="ctr"/>
+          <a:lstStyle/>
+          <a:p>
+            <a:pPr algn="ctr" indent="0" marL="0">
+              <a:lnSpc>
+                <a:spcPct val="100000"/>
+              </a:lnSpc>
+              <a:buNone/>
+            </a:pPr>
+            <a:r>
+              <a:rPr lang="en-US" sz="2200" b="1" dirty="0">
+                <a:solidFill>
+                  <a:srgbClr val="1C1C1C"/>
+                </a:solidFill>
+                <a:latin typeface="Orbitron Bold" pitchFamily="34" charset="0"/>
+                <a:ea typeface="Orbitron Bold" pitchFamily="34" charset="-122"/>
+                <a:cs typeface="Orbitron Bold" pitchFamily="34" charset="-120"/>
+              </a:rPr>
+              <a:t>4</a:t>
+            </a:r>
+            <a:endParaRPr lang="en-US" sz="2200" dirty="0"/>
+          </a:p>
+        </p:txBody>
+      </p:sp>
+      <p:sp>
+        <p:nvSpPr>
+          <p:cNvPr id="17" name="Text 11"/>
+          <p:cNvSpPr/>
+          <p:nvPr/>
+        </p:nvSpPr>
+        <p:spPr>
+          <a:xfrm>
+            <a:off x="6404708" y="4727873"/>
+            <a:ext cx="4911106" cy="295275"/>
+          </a:xfrm>
+          <a:prstGeom prst="rect">
+            <a:avLst/>
+          </a:prstGeom>
+          <a:noFill/>
+          <a:ln/>
+        </p:spPr>
+        <p:txBody>
+          <a:bodyPr wrap="none" lIns="0" tIns="0" rIns="0" bIns="0" rtlCol="0" anchor="t"/>
+          <a:lstStyle/>
+          <a:p>
+            <a:pPr algn="l" indent="0" marL="0">
+              <a:lnSpc>
+                <a:spcPct val="104000"/>
+              </a:lnSpc>
+              <a:buNone/>
+            </a:pPr>
+            <a:r>
+              <a:rPr lang="en-US" sz="1850" b="1" dirty="0">
+                <a:solidFill>
+                  <a:srgbClr val="1C1C1C"/>
+                </a:solidFill>
+                <a:latin typeface="Orbitron Bold" pitchFamily="34" charset="0"/>
+                <a:ea typeface="Orbitron Bold" pitchFamily="34" charset="-122"/>
+                <a:cs typeface="Orbitron Bold" pitchFamily="34" charset="-120"/>
+              </a:rPr>
+              <a:t>Build 2</a:t>
+            </a:r>
+            <a:endParaRPr lang="en-US" sz="1850" dirty="0"/>
+          </a:p>
+        </p:txBody>
+      </p:sp>
+      <p:sp>
+        <p:nvSpPr>
+          <p:cNvPr id="18" name="Text 12"/>
+          <p:cNvSpPr/>
+          <p:nvPr/>
+        </p:nvSpPr>
+        <p:spPr>
+          <a:xfrm>
+            <a:off x="6404708" y="5136555"/>
+            <a:ext cx="4911106" cy="302419"/>
+          </a:xfrm>
+          <a:prstGeom prst="rect">
+            <a:avLst/>
+          </a:prstGeom>
+          <a:noFill/>
+          <a:ln/>
+        </p:spPr>
+        <p:txBody>
+          <a:bodyPr wrap="none" lIns="0" tIns="0" rIns="0" bIns="0" rtlCol="0" anchor="t"/>
+          <a:lstStyle/>
+          <a:p>
+            <a:pPr algn="l" indent="0" marL="0">
+              <a:lnSpc>
+                <a:spcPct val="133000"/>
+              </a:lnSpc>
+              <a:buNone/>
+            </a:pPr>
+            <a:r>
+              <a:rPr lang="en-US" sz="1450" dirty="0">
+                <a:solidFill>
+                  <a:srgbClr val="1C1C1C"/>
+                </a:solidFill>
+                <a:latin typeface="Roboto Condensed" pitchFamily="34" charset="0"/>
+                <a:ea typeface="Roboto Condensed" pitchFamily="34" charset="-122"/>
+                <a:cs typeface="Roboto Condensed" pitchFamily="34" charset="-120"/>
+              </a:rPr>
+              <a:t>The data pipeline opens</a:t>
+            </a:r>
+            <a:endParaRPr lang="en-US" sz="1450" dirty="0"/>
+          </a:p>
+        </p:txBody>
+      </p:sp>
+      <p:sp>
+        <p:nvSpPr>
+          <p:cNvPr id="19" name="Text 13"/>
           <p:cNvSpPr/>
           <p:nvPr/>
         </p:nvSpPr>
@@ -2960,7 +3158,7 @@
         </p:nvSpPr>
         <p:spPr>
           <a:xfrm>
-            <a:off x="661475" y="1326455"/>
+            <a:off x="661475" y="1064022"/>
             <a:ext cx="10868745" cy="590649"/>
           </a:xfrm>
           <a:prstGeom prst="rect">
@@ -2994,46 +3192,43 @@
           </a:p>
         </p:txBody>
       </p:sp>
-      <p:pic>
-        <p:nvPicPr>
-          <p:cNvPr id="3" name="Image 0" descr="preencoded.png">    </p:cNvPr>
-          <p:cNvPicPr>
-            <a:picLocks noChangeAspect="1"/>
-          </p:cNvPicPr>
-          <p:nvPr/>
-        </p:nvPicPr>
-        <p:blipFill>
-          <a:blip r:embed="rId1">
-            <a:extLst>
-              <a:ext uri="{96DAC541-7B7A-43D3-8B79-37D633B846F1}">
-                <asvg:svgBlip xmlns:asvg="http://schemas.microsoft.com/office/drawing/2016/SVG/main" r:embed="rId2"/>
-              </a:ext>
-            </a:extLst>
-          </a:blip>
-          <a:stretch>
-            <a:fillRect/>
-          </a:stretch>
-        </p:blipFill>
-        <p:spPr>
-          <a:xfrm>
-            <a:off x="661475" y="2295128"/>
-            <a:ext cx="3496877" cy="1314648"/>
-          </a:xfrm>
-          <a:prstGeom prst="rect">
-            <a:avLst/>
-          </a:prstGeom>
-        </p:spPr>
-      </p:pic>
-      <p:sp>
-        <p:nvSpPr>
-          <p:cNvPr id="4" name="Text 1"/>
-          <p:cNvSpPr/>
-          <p:nvPr/>
-        </p:nvSpPr>
-        <p:spPr>
-          <a:xfrm>
-            <a:off x="977479" y="2509540"/>
-            <a:ext cx="2966467" cy="590550"/>
+      <p:sp>
+        <p:nvSpPr>
+          <p:cNvPr id="3" name="Shape 1"/>
+          <p:cNvSpPr/>
+          <p:nvPr/>
+        </p:nvSpPr>
+        <p:spPr>
+          <a:xfrm>
+            <a:off x="661475" y="2032695"/>
+            <a:ext cx="425241" cy="425252"/>
+          </a:xfrm>
+          <a:prstGeom prst="roundRect">
+            <a:avLst>
+              <a:gd name="adj" fmla="val 18669"/>
+            </a:avLst>
+          </a:prstGeom>
+          <a:solidFill>
+            <a:srgbClr val="D1E5FA"/>
+          </a:solidFill>
+          <a:ln w="19050">
+            <a:solidFill>
+              <a:srgbClr val="B7CBE0"/>
+            </a:solidFill>
+            <a:prstDash val="solid"/>
+          </a:ln>
+        </p:spPr>
+      </p:sp>
+      <p:sp>
+        <p:nvSpPr>
+          <p:cNvPr id="4" name="Text 2"/>
+          <p:cNvSpPr/>
+          <p:nvPr/>
+        </p:nvSpPr>
+        <p:spPr>
+          <a:xfrm>
+            <a:off x="732365" y="2068116"/>
+            <a:ext cx="283461" cy="354409"/>
           </a:xfrm>
           <a:prstGeom prst="rect">
             <a:avLst/>
@@ -3042,19 +3237,17 @@
           <a:ln/>
         </p:spPr>
         <p:txBody>
-          <a:bodyPr wrap="square" lIns="0" tIns="0" rIns="0" bIns="0" rtlCol="0" anchor="t">
-            <a:normAutofit/>
-          </a:bodyPr>
-          <a:lstStyle/>
-          <a:p>
-            <a:pPr algn="l" indent="0" marL="0">
-              <a:lnSpc>
-                <a:spcPct val="104000"/>
-              </a:lnSpc>
-              <a:buNone/>
-            </a:pPr>
-            <a:r>
-              <a:rPr lang="en-US" sz="1850" b="1" dirty="0">
+          <a:bodyPr wrap="none" lIns="0" tIns="0" rIns="0" bIns="0" rtlCol="0" anchor="ctr"/>
+          <a:lstStyle/>
+          <a:p>
+            <a:pPr algn="ctr" indent="0" marL="0">
+              <a:lnSpc>
+                <a:spcPct val="100000"/>
+              </a:lnSpc>
+              <a:buNone/>
+            </a:pPr>
+            <a:r>
+              <a:rPr lang="en-US" sz="2200" b="1" dirty="0">
                 <a:solidFill>
                   <a:srgbClr val="1C1C1C"/>
                 </a:solidFill>
@@ -3062,52 +3255,22 @@
                 <a:ea typeface="Orbitron Bold" pitchFamily="34" charset="-122"/>
                 <a:cs typeface="Orbitron Bold" pitchFamily="34" charset="-120"/>
               </a:rPr>
-              <a:t>Read robots.txt first, and obey it</a:t>
-            </a:r>
-            <a:endParaRPr lang="en-US" sz="1850" dirty="0"/>
-          </a:p>
-        </p:txBody>
-      </p:sp>
-      <p:pic>
-        <p:nvPicPr>
-          <p:cNvPr id="5" name="Image 1" descr="preencoded.png">    </p:cNvPr>
-          <p:cNvPicPr>
-            <a:picLocks noChangeAspect="1"/>
-          </p:cNvPicPr>
-          <p:nvPr/>
-        </p:nvPicPr>
-        <p:blipFill>
-          <a:blip r:embed="rId3">
-            <a:extLst>
-              <a:ext uri="{96DAC541-7B7A-43D3-8B79-37D633B846F1}">
-                <asvg:svgBlip xmlns:asvg="http://schemas.microsoft.com/office/drawing/2016/SVG/main" r:embed="rId4"/>
-              </a:ext>
-            </a:extLst>
-          </a:blip>
-          <a:stretch>
-            <a:fillRect/>
-          </a:stretch>
-        </p:blipFill>
-        <p:spPr>
-          <a:xfrm>
-            <a:off x="4347359" y="2295128"/>
-            <a:ext cx="3496877" cy="1314648"/>
-          </a:xfrm>
-          <a:prstGeom prst="rect">
-            <a:avLst/>
-          </a:prstGeom>
-        </p:spPr>
-      </p:pic>
-      <p:sp>
-        <p:nvSpPr>
-          <p:cNvPr id="6" name="Text 2"/>
-          <p:cNvSpPr/>
-          <p:nvPr/>
-        </p:nvSpPr>
-        <p:spPr>
-          <a:xfrm>
-            <a:off x="4663363" y="2509540"/>
-            <a:ext cx="2966467" cy="590550"/>
+              <a:t>1</a:t>
+            </a:r>
+            <a:endParaRPr lang="en-US" sz="2200" dirty="0"/>
+          </a:p>
+        </p:txBody>
+      </p:sp>
+      <p:sp>
+        <p:nvSpPr>
+          <p:cNvPr id="5" name="Text 3"/>
+          <p:cNvSpPr/>
+          <p:nvPr/>
+        </p:nvSpPr>
+        <p:spPr>
+          <a:xfrm>
+            <a:off x="1275723" y="2097584"/>
+            <a:ext cx="10254497" cy="295275"/>
           </a:xfrm>
           <a:prstGeom prst="rect">
             <a:avLst/>
@@ -3116,9 +3279,7 @@
           <a:ln/>
         </p:spPr>
         <p:txBody>
-          <a:bodyPr wrap="square" lIns="0" tIns="0" rIns="0" bIns="0" rtlCol="0" anchor="t">
-            <a:normAutofit/>
-          </a:bodyPr>
+          <a:bodyPr wrap="none" lIns="0" tIns="0" rIns="0" bIns="0" rtlCol="0" anchor="t"/>
           <a:lstStyle/>
           <a:p>
             <a:pPr algn="l" indent="0" marL="0">
@@ -3136,52 +3297,49 @@
                 <a:ea typeface="Orbitron Bold" pitchFamily="34" charset="-122"/>
                 <a:cs typeface="Orbitron Bold" pitchFamily="34" charset="-120"/>
               </a:rPr>
-              <a:t>Read the terms of use, and quote them</a:t>
+              <a:t>Read robots.txt first, and obey it</a:t>
             </a:r>
             <a:endParaRPr lang="en-US" sz="1850" dirty="0"/>
           </a:p>
         </p:txBody>
       </p:sp>
-      <p:pic>
-        <p:nvPicPr>
-          <p:cNvPr id="7" name="Image 2" descr="preencoded.png">    </p:cNvPr>
-          <p:cNvPicPr>
-            <a:picLocks noChangeAspect="1"/>
-          </p:cNvPicPr>
-          <p:nvPr/>
-        </p:nvPicPr>
-        <p:blipFill>
-          <a:blip r:embed="rId5">
-            <a:extLst>
-              <a:ext uri="{96DAC541-7B7A-43D3-8B79-37D633B846F1}">
-                <asvg:svgBlip xmlns:asvg="http://schemas.microsoft.com/office/drawing/2016/SVG/main" r:embed="rId6"/>
-              </a:ext>
-            </a:extLst>
-          </a:blip>
-          <a:stretch>
-            <a:fillRect/>
-          </a:stretch>
-        </p:blipFill>
-        <p:spPr>
-          <a:xfrm>
-            <a:off x="8033244" y="2295128"/>
-            <a:ext cx="3496877" cy="1314648"/>
-          </a:xfrm>
-          <a:prstGeom prst="rect">
-            <a:avLst/>
-          </a:prstGeom>
-        </p:spPr>
-      </p:pic>
-      <p:sp>
-        <p:nvSpPr>
-          <p:cNvPr id="8" name="Text 3"/>
-          <p:cNvSpPr/>
-          <p:nvPr/>
-        </p:nvSpPr>
-        <p:spPr>
-          <a:xfrm>
-            <a:off x="8349247" y="2509540"/>
-            <a:ext cx="2966467" cy="885825"/>
+      <p:sp>
+        <p:nvSpPr>
+          <p:cNvPr id="6" name="Shape 4"/>
+          <p:cNvSpPr/>
+          <p:nvPr/>
+        </p:nvSpPr>
+        <p:spPr>
+          <a:xfrm>
+            <a:off x="661475" y="2835970"/>
+            <a:ext cx="425241" cy="425252"/>
+          </a:xfrm>
+          <a:prstGeom prst="roundRect">
+            <a:avLst>
+              <a:gd name="adj" fmla="val 18669"/>
+            </a:avLst>
+          </a:prstGeom>
+          <a:solidFill>
+            <a:srgbClr val="D1E5FA"/>
+          </a:solidFill>
+          <a:ln w="19050">
+            <a:solidFill>
+              <a:srgbClr val="B7CBE0"/>
+            </a:solidFill>
+            <a:prstDash val="solid"/>
+          </a:ln>
+        </p:spPr>
+      </p:sp>
+      <p:sp>
+        <p:nvSpPr>
+          <p:cNvPr id="7" name="Text 5"/>
+          <p:cNvSpPr/>
+          <p:nvPr/>
+        </p:nvSpPr>
+        <p:spPr>
+          <a:xfrm>
+            <a:off x="732365" y="2871391"/>
+            <a:ext cx="283461" cy="354409"/>
           </a:xfrm>
           <a:prstGeom prst="rect">
             <a:avLst/>
@@ -3190,19 +3348,17 @@
           <a:ln/>
         </p:spPr>
         <p:txBody>
-          <a:bodyPr wrap="square" lIns="0" tIns="0" rIns="0" bIns="0" rtlCol="0" anchor="t">
-            <a:normAutofit/>
-          </a:bodyPr>
-          <a:lstStyle/>
-          <a:p>
-            <a:pPr algn="l" indent="0" marL="0">
-              <a:lnSpc>
-                <a:spcPct val="104000"/>
-              </a:lnSpc>
-              <a:buNone/>
-            </a:pPr>
-            <a:r>
-              <a:rPr lang="en-US" sz="1850" b="1" dirty="0">
+          <a:bodyPr wrap="none" lIns="0" tIns="0" rIns="0" bIns="0" rtlCol="0" anchor="ctr"/>
+          <a:lstStyle/>
+          <a:p>
+            <a:pPr algn="ctr" indent="0" marL="0">
+              <a:lnSpc>
+                <a:spcPct val="100000"/>
+              </a:lnSpc>
+              <a:buNone/>
+            </a:pPr>
+            <a:r>
+              <a:rPr lang="en-US" sz="2200" b="1" dirty="0">
                 <a:solidFill>
                   <a:srgbClr val="1C1C1C"/>
                 </a:solidFill>
@@ -3210,52 +3366,22 @@
                 <a:ea typeface="Orbitron Bold" pitchFamily="34" charset="-122"/>
                 <a:cs typeface="Orbitron Bold" pitchFamily="34" charset="-120"/>
               </a:rPr>
-              <a:t>Wait between requests, at least what they ask</a:t>
-            </a:r>
-            <a:endParaRPr lang="en-US" sz="1850" dirty="0"/>
-          </a:p>
-        </p:txBody>
-      </p:sp>
-      <p:pic>
-        <p:nvPicPr>
-          <p:cNvPr id="9" name="Image 3" descr="preencoded.png">    </p:cNvPr>
-          <p:cNvPicPr>
-            <a:picLocks noChangeAspect="1"/>
-          </p:cNvPicPr>
-          <p:nvPr/>
-        </p:nvPicPr>
-        <p:blipFill>
-          <a:blip r:embed="rId7">
-            <a:extLst>
-              <a:ext uri="{96DAC541-7B7A-43D3-8B79-37D633B846F1}">
-                <asvg:svgBlip xmlns:asvg="http://schemas.microsoft.com/office/drawing/2016/SVG/main" r:embed="rId8"/>
-              </a:ext>
-            </a:extLst>
-          </a:blip>
-          <a:stretch>
-            <a:fillRect/>
-          </a:stretch>
-        </p:blipFill>
-        <p:spPr>
-          <a:xfrm>
-            <a:off x="661475" y="3798788"/>
-            <a:ext cx="3496877" cy="1609923"/>
-          </a:xfrm>
-          <a:prstGeom prst="rect">
-            <a:avLst/>
-          </a:prstGeom>
-        </p:spPr>
-      </p:pic>
-      <p:sp>
-        <p:nvSpPr>
-          <p:cNvPr id="10" name="Text 4"/>
-          <p:cNvSpPr/>
-          <p:nvPr/>
-        </p:nvSpPr>
-        <p:spPr>
-          <a:xfrm>
-            <a:off x="977479" y="4013200"/>
-            <a:ext cx="2966467" cy="885825"/>
+              <a:t>2</a:t>
+            </a:r>
+            <a:endParaRPr lang="en-US" sz="2200" dirty="0"/>
+          </a:p>
+        </p:txBody>
+      </p:sp>
+      <p:sp>
+        <p:nvSpPr>
+          <p:cNvPr id="8" name="Text 6"/>
+          <p:cNvSpPr/>
+          <p:nvPr/>
+        </p:nvSpPr>
+        <p:spPr>
+          <a:xfrm>
+            <a:off x="1275723" y="2900859"/>
+            <a:ext cx="10254497" cy="295275"/>
           </a:xfrm>
           <a:prstGeom prst="rect">
             <a:avLst/>
@@ -3264,9 +3390,7 @@
           <a:ln/>
         </p:spPr>
         <p:txBody>
-          <a:bodyPr wrap="square" lIns="0" tIns="0" rIns="0" bIns="0" rtlCol="0" anchor="t">
-            <a:normAutofit/>
-          </a:bodyPr>
+          <a:bodyPr wrap="none" lIns="0" tIns="0" rIns="0" bIns="0" rtlCol="0" anchor="t"/>
           <a:lstStyle/>
           <a:p>
             <a:pPr algn="l" indent="0" marL="0">
@@ -3284,52 +3408,49 @@
                 <a:ea typeface="Orbitron Bold" pitchFamily="34" charset="-122"/>
                 <a:cs typeface="Orbitron Bold" pitchFamily="34" charset="-120"/>
               </a:rPr>
-              <a:t>Never scrape anything behind a login</a:t>
+              <a:t>Read the terms of use, and quote them</a:t>
             </a:r>
             <a:endParaRPr lang="en-US" sz="1850" dirty="0"/>
           </a:p>
         </p:txBody>
       </p:sp>
-      <p:pic>
-        <p:nvPicPr>
-          <p:cNvPr id="11" name="Image 4" descr="preencoded.png">    </p:cNvPr>
-          <p:cNvPicPr>
-            <a:picLocks noChangeAspect="1"/>
-          </p:cNvPicPr>
-          <p:nvPr/>
-        </p:nvPicPr>
-        <p:blipFill>
-          <a:blip r:embed="rId9">
-            <a:extLst>
-              <a:ext uri="{96DAC541-7B7A-43D3-8B79-37D633B846F1}">
-                <asvg:svgBlip xmlns:asvg="http://schemas.microsoft.com/office/drawing/2016/SVG/main" r:embed="rId10"/>
-              </a:ext>
-            </a:extLst>
-          </a:blip>
-          <a:stretch>
-            <a:fillRect/>
-          </a:stretch>
-        </p:blipFill>
-        <p:spPr>
-          <a:xfrm>
-            <a:off x="4347359" y="3798788"/>
-            <a:ext cx="3496877" cy="1609923"/>
-          </a:xfrm>
-          <a:prstGeom prst="rect">
-            <a:avLst/>
-          </a:prstGeom>
-        </p:spPr>
-      </p:pic>
-      <p:sp>
-        <p:nvSpPr>
-          <p:cNvPr id="12" name="Text 5"/>
-          <p:cNvSpPr/>
-          <p:nvPr/>
-        </p:nvSpPr>
-        <p:spPr>
-          <a:xfrm>
-            <a:off x="4663363" y="4013200"/>
-            <a:ext cx="2966467" cy="1181100"/>
+      <p:sp>
+        <p:nvSpPr>
+          <p:cNvPr id="9" name="Shape 7"/>
+          <p:cNvSpPr/>
+          <p:nvPr/>
+        </p:nvSpPr>
+        <p:spPr>
+          <a:xfrm>
+            <a:off x="661475" y="3639245"/>
+            <a:ext cx="425241" cy="425252"/>
+          </a:xfrm>
+          <a:prstGeom prst="roundRect">
+            <a:avLst>
+              <a:gd name="adj" fmla="val 18669"/>
+            </a:avLst>
+          </a:prstGeom>
+          <a:solidFill>
+            <a:srgbClr val="D1E5FA"/>
+          </a:solidFill>
+          <a:ln w="19050">
+            <a:solidFill>
+              <a:srgbClr val="B7CBE0"/>
+            </a:solidFill>
+            <a:prstDash val="solid"/>
+          </a:ln>
+        </p:spPr>
+      </p:sp>
+      <p:sp>
+        <p:nvSpPr>
+          <p:cNvPr id="10" name="Text 8"/>
+          <p:cNvSpPr/>
+          <p:nvPr/>
+        </p:nvSpPr>
+        <p:spPr>
+          <a:xfrm>
+            <a:off x="732365" y="3674666"/>
+            <a:ext cx="283461" cy="354409"/>
           </a:xfrm>
           <a:prstGeom prst="rect">
             <a:avLst/>
@@ -3338,19 +3459,17 @@
           <a:ln/>
         </p:spPr>
         <p:txBody>
-          <a:bodyPr wrap="square" lIns="0" tIns="0" rIns="0" bIns="0" rtlCol="0" anchor="t">
-            <a:normAutofit/>
-          </a:bodyPr>
-          <a:lstStyle/>
-          <a:p>
-            <a:pPr algn="l" indent="0" marL="0">
-              <a:lnSpc>
-                <a:spcPct val="104000"/>
-              </a:lnSpc>
-              <a:buNone/>
-            </a:pPr>
-            <a:r>
-              <a:rPr lang="en-US" sz="1850" b="1" dirty="0">
+          <a:bodyPr wrap="none" lIns="0" tIns="0" rIns="0" bIns="0" rtlCol="0" anchor="ctr"/>
+          <a:lstStyle/>
+          <a:p>
+            <a:pPr algn="ctr" indent="0" marL="0">
+              <a:lnSpc>
+                <a:spcPct val="100000"/>
+              </a:lnSpc>
+              <a:buNone/>
+            </a:pPr>
+            <a:r>
+              <a:rPr lang="en-US" sz="2200" b="1" dirty="0">
                 <a:solidFill>
                   <a:srgbClr val="1C1C1C"/>
                 </a:solidFill>
@@ -3358,6 +3477,270 @@
                 <a:ea typeface="Orbitron Bold" pitchFamily="34" charset="-122"/>
                 <a:cs typeface="Orbitron Bold" pitchFamily="34" charset="-120"/>
               </a:rPr>
+              <a:t>3</a:t>
+            </a:r>
+            <a:endParaRPr lang="en-US" sz="2200" dirty="0"/>
+          </a:p>
+        </p:txBody>
+      </p:sp>
+      <p:sp>
+        <p:nvSpPr>
+          <p:cNvPr id="11" name="Text 9"/>
+          <p:cNvSpPr/>
+          <p:nvPr/>
+        </p:nvSpPr>
+        <p:spPr>
+          <a:xfrm>
+            <a:off x="1275723" y="3704134"/>
+            <a:ext cx="10254497" cy="295275"/>
+          </a:xfrm>
+          <a:prstGeom prst="rect">
+            <a:avLst/>
+          </a:prstGeom>
+          <a:noFill/>
+          <a:ln/>
+        </p:spPr>
+        <p:txBody>
+          <a:bodyPr wrap="none" lIns="0" tIns="0" rIns="0" bIns="0" rtlCol="0" anchor="t"/>
+          <a:lstStyle/>
+          <a:p>
+            <a:pPr algn="l" indent="0" marL="0">
+              <a:lnSpc>
+                <a:spcPct val="104000"/>
+              </a:lnSpc>
+              <a:buNone/>
+            </a:pPr>
+            <a:r>
+              <a:rPr lang="en-US" sz="1850" b="1" dirty="0">
+                <a:solidFill>
+                  <a:srgbClr val="1C1C1C"/>
+                </a:solidFill>
+                <a:latin typeface="Orbitron Bold" pitchFamily="34" charset="0"/>
+                <a:ea typeface="Orbitron Bold" pitchFamily="34" charset="-122"/>
+                <a:cs typeface="Orbitron Bold" pitchFamily="34" charset="-120"/>
+              </a:rPr>
+              <a:t>Wait between requests, at least what they ask</a:t>
+            </a:r>
+            <a:endParaRPr lang="en-US" sz="1850" dirty="0"/>
+          </a:p>
+        </p:txBody>
+      </p:sp>
+      <p:sp>
+        <p:nvSpPr>
+          <p:cNvPr id="12" name="Shape 10"/>
+          <p:cNvSpPr/>
+          <p:nvPr/>
+        </p:nvSpPr>
+        <p:spPr>
+          <a:xfrm>
+            <a:off x="661475" y="4442520"/>
+            <a:ext cx="425241" cy="425252"/>
+          </a:xfrm>
+          <a:prstGeom prst="roundRect">
+            <a:avLst>
+              <a:gd name="adj" fmla="val 18669"/>
+            </a:avLst>
+          </a:prstGeom>
+          <a:solidFill>
+            <a:srgbClr val="D1E5FA"/>
+          </a:solidFill>
+          <a:ln w="19050">
+            <a:solidFill>
+              <a:srgbClr val="B7CBE0"/>
+            </a:solidFill>
+            <a:prstDash val="solid"/>
+          </a:ln>
+        </p:spPr>
+      </p:sp>
+      <p:sp>
+        <p:nvSpPr>
+          <p:cNvPr id="13" name="Text 11"/>
+          <p:cNvSpPr/>
+          <p:nvPr/>
+        </p:nvSpPr>
+        <p:spPr>
+          <a:xfrm>
+            <a:off x="732365" y="4477941"/>
+            <a:ext cx="283461" cy="354409"/>
+          </a:xfrm>
+          <a:prstGeom prst="rect">
+            <a:avLst/>
+          </a:prstGeom>
+          <a:noFill/>
+          <a:ln/>
+        </p:spPr>
+        <p:txBody>
+          <a:bodyPr wrap="none" lIns="0" tIns="0" rIns="0" bIns="0" rtlCol="0" anchor="ctr"/>
+          <a:lstStyle/>
+          <a:p>
+            <a:pPr algn="ctr" indent="0" marL="0">
+              <a:lnSpc>
+                <a:spcPct val="100000"/>
+              </a:lnSpc>
+              <a:buNone/>
+            </a:pPr>
+            <a:r>
+              <a:rPr lang="en-US" sz="2200" b="1" dirty="0">
+                <a:solidFill>
+                  <a:srgbClr val="1C1C1C"/>
+                </a:solidFill>
+                <a:latin typeface="Orbitron Bold" pitchFamily="34" charset="0"/>
+                <a:ea typeface="Orbitron Bold" pitchFamily="34" charset="-122"/>
+                <a:cs typeface="Orbitron Bold" pitchFamily="34" charset="-120"/>
+              </a:rPr>
+              <a:t>4</a:t>
+            </a:r>
+            <a:endParaRPr lang="en-US" sz="2200" dirty="0"/>
+          </a:p>
+        </p:txBody>
+      </p:sp>
+      <p:sp>
+        <p:nvSpPr>
+          <p:cNvPr id="14" name="Text 12"/>
+          <p:cNvSpPr/>
+          <p:nvPr/>
+        </p:nvSpPr>
+        <p:spPr>
+          <a:xfrm>
+            <a:off x="1275723" y="4507409"/>
+            <a:ext cx="10254497" cy="295275"/>
+          </a:xfrm>
+          <a:prstGeom prst="rect">
+            <a:avLst/>
+          </a:prstGeom>
+          <a:noFill/>
+          <a:ln/>
+        </p:spPr>
+        <p:txBody>
+          <a:bodyPr wrap="none" lIns="0" tIns="0" rIns="0" bIns="0" rtlCol="0" anchor="t"/>
+          <a:lstStyle/>
+          <a:p>
+            <a:pPr algn="l" indent="0" marL="0">
+              <a:lnSpc>
+                <a:spcPct val="104000"/>
+              </a:lnSpc>
+              <a:buNone/>
+            </a:pPr>
+            <a:r>
+              <a:rPr lang="en-US" sz="1850" b="1" dirty="0">
+                <a:solidFill>
+                  <a:srgbClr val="1C1C1C"/>
+                </a:solidFill>
+                <a:latin typeface="Orbitron Bold" pitchFamily="34" charset="0"/>
+                <a:ea typeface="Orbitron Bold" pitchFamily="34" charset="-122"/>
+                <a:cs typeface="Orbitron Bold" pitchFamily="34" charset="-120"/>
+              </a:rPr>
+              <a:t>Never scrape anything behind a login</a:t>
+            </a:r>
+            <a:endParaRPr lang="en-US" sz="1850" dirty="0"/>
+          </a:p>
+        </p:txBody>
+      </p:sp>
+      <p:sp>
+        <p:nvSpPr>
+          <p:cNvPr id="15" name="Shape 13"/>
+          <p:cNvSpPr/>
+          <p:nvPr/>
+        </p:nvSpPr>
+        <p:spPr>
+          <a:xfrm>
+            <a:off x="661475" y="5245795"/>
+            <a:ext cx="425241" cy="425252"/>
+          </a:xfrm>
+          <a:prstGeom prst="roundRect">
+            <a:avLst>
+              <a:gd name="adj" fmla="val 18669"/>
+            </a:avLst>
+          </a:prstGeom>
+          <a:solidFill>
+            <a:srgbClr val="D1E5FA"/>
+          </a:solidFill>
+          <a:ln w="19050">
+            <a:solidFill>
+              <a:srgbClr val="B7CBE0"/>
+            </a:solidFill>
+            <a:prstDash val="solid"/>
+          </a:ln>
+        </p:spPr>
+      </p:sp>
+      <p:sp>
+        <p:nvSpPr>
+          <p:cNvPr id="16" name="Text 14"/>
+          <p:cNvSpPr/>
+          <p:nvPr/>
+        </p:nvSpPr>
+        <p:spPr>
+          <a:xfrm>
+            <a:off x="732365" y="5281216"/>
+            <a:ext cx="283461" cy="354409"/>
+          </a:xfrm>
+          <a:prstGeom prst="rect">
+            <a:avLst/>
+          </a:prstGeom>
+          <a:noFill/>
+          <a:ln/>
+        </p:spPr>
+        <p:txBody>
+          <a:bodyPr wrap="none" lIns="0" tIns="0" rIns="0" bIns="0" rtlCol="0" anchor="ctr"/>
+          <a:lstStyle/>
+          <a:p>
+            <a:pPr algn="ctr" indent="0" marL="0">
+              <a:lnSpc>
+                <a:spcPct val="100000"/>
+              </a:lnSpc>
+              <a:buNone/>
+            </a:pPr>
+            <a:r>
+              <a:rPr lang="en-US" sz="2200" b="1" dirty="0">
+                <a:solidFill>
+                  <a:srgbClr val="1C1C1C"/>
+                </a:solidFill>
+                <a:latin typeface="Orbitron Bold" pitchFamily="34" charset="0"/>
+                <a:ea typeface="Orbitron Bold" pitchFamily="34" charset="-122"/>
+                <a:cs typeface="Orbitron Bold" pitchFamily="34" charset="-120"/>
+              </a:rPr>
+              <a:t>5</a:t>
+            </a:r>
+            <a:endParaRPr lang="en-US" sz="2200" dirty="0"/>
+          </a:p>
+        </p:txBody>
+      </p:sp>
+      <p:sp>
+        <p:nvSpPr>
+          <p:cNvPr id="17" name="Text 15"/>
+          <p:cNvSpPr/>
+          <p:nvPr/>
+        </p:nvSpPr>
+        <p:spPr>
+          <a:xfrm>
+            <a:off x="1275723" y="5310684"/>
+            <a:ext cx="10254497" cy="295275"/>
+          </a:xfrm>
+          <a:prstGeom prst="rect">
+            <a:avLst/>
+          </a:prstGeom>
+          <a:noFill/>
+          <a:ln/>
+        </p:spPr>
+        <p:txBody>
+          <a:bodyPr wrap="none" lIns="0" tIns="0" rIns="0" bIns="0" rtlCol="0" anchor="t"/>
+          <a:lstStyle/>
+          <a:p>
+            <a:pPr algn="l" indent="0" marL="0">
+              <a:lnSpc>
+                <a:spcPct val="104000"/>
+              </a:lnSpc>
+              <a:buNone/>
+            </a:pPr>
+            <a:r>
+              <a:rPr lang="en-US" sz="1850" b="1" dirty="0">
+                <a:solidFill>
+                  <a:srgbClr val="1C1C1C"/>
+                </a:solidFill>
+                <a:latin typeface="Orbitron Bold" pitchFamily="34" charset="0"/>
+                <a:ea typeface="Orbitron Bold" pitchFamily="34" charset="-122"/>
+                <a:cs typeface="Orbitron Bold" pitchFamily="34" charset="-120"/>
+              </a:rPr>
               <a:t>Never collect personal information, and use an API if offered</a:t>
             </a:r>
             <a:endParaRPr lang="en-US" sz="1850" dirty="0"/>
@@ -3366,7 +3749,7 @@
       </p:sp>
       <p:sp>
         <p:nvSpPr>
-          <p:cNvPr id="13" name="Text 6"/>
+          <p:cNvPr id="18" name="Text 16"/>
           <p:cNvSpPr/>
           <p:nvPr/>
         </p:nvSpPr>
@@ -3439,7 +3822,7 @@
         </p:nvSpPr>
         <p:spPr>
           <a:xfrm>
-            <a:off x="661475" y="1741388"/>
+            <a:off x="661475" y="761901"/>
             <a:ext cx="10868745" cy="590649"/>
           </a:xfrm>
           <a:prstGeom prst="rect">
@@ -3473,16 +3856,40 @@
           </a:p>
         </p:txBody>
       </p:sp>
-      <p:sp>
-        <p:nvSpPr>
-          <p:cNvPr id="3" name="Text 1"/>
-          <p:cNvSpPr/>
-          <p:nvPr/>
-        </p:nvSpPr>
-        <p:spPr>
-          <a:xfrm>
-            <a:off x="661475" y="2785566"/>
-            <a:ext cx="5203794" cy="913606"/>
+      <p:pic>
+        <p:nvPicPr>
+          <p:cNvPr id="3" name="Image 0" descr="preencoded.png">    </p:cNvPr>
+          <p:cNvPicPr>
+            <a:picLocks noChangeAspect="1"/>
+          </p:cNvPicPr>
+          <p:nvPr/>
+        </p:nvPicPr>
+        <p:blipFill>
+          <a:blip r:embed="rId1"/>
+          <a:stretch>
+            <a:fillRect/>
+          </a:stretch>
+        </p:blipFill>
+        <p:spPr>
+          <a:xfrm>
+            <a:off x="661475" y="1848644"/>
+            <a:ext cx="6903269" cy="3911898"/>
+          </a:xfrm>
+          <a:prstGeom prst="rect">
+            <a:avLst/>
+          </a:prstGeom>
+        </p:spPr>
+      </p:pic>
+      <p:sp>
+        <p:nvSpPr>
+          <p:cNvPr id="4" name="Text 1"/>
+          <p:cNvSpPr/>
+          <p:nvPr/>
+        </p:nvSpPr>
+        <p:spPr>
+          <a:xfrm>
+            <a:off x="8032251" y="2278261"/>
+            <a:ext cx="3504219" cy="1209675"/>
           </a:xfrm>
           <a:prstGeom prst="rect">
             <a:avLst/>
@@ -3511,44 +3918,7 @@
                 <a:ea typeface="Roboto Condensed" pitchFamily="34" charset="-122"/>
                 <a:cs typeface="Roboto Condensed" pitchFamily="34" charset="-120"/>
               </a:rPr>
-              <a:t>The </a:t>
-            </a:r>
-            <a:pPr algn="l" indent="0" marL="0">
-              <a:lnSpc>
-                <a:spcPct val="133000"/>
-              </a:lnSpc>
-              <a:buNone/>
-            </a:pPr>
-            <a:r>
-              <a:rPr lang="en-US" sz="1450" dirty="0">
-                <a:solidFill>
-                  <a:srgbClr val="1C1C1C"/>
-                </a:solidFill>
-                <a:highlight>
-                  <a:srgbClr val="F2F2F2"/>
-                </a:highlight>
-                <a:latin typeface="Consolas" pitchFamily="34" charset="0"/>
-                <a:ea typeface="Consolas" pitchFamily="34" charset="-122"/>
-                <a:cs typeface="Consolas" pitchFamily="34" charset="-120"/>
-              </a:rPr>
-              <a:t>robots.txt</a:t>
-            </a:r>
-            <a:pPr algn="l" indent="0" marL="0">
-              <a:lnSpc>
-                <a:spcPct val="133000"/>
-              </a:lnSpc>
-              <a:buNone/>
-            </a:pPr>
-            <a:r>
-              <a:rPr lang="en-US" sz="1450" dirty="0">
-                <a:solidFill>
-                  <a:srgbClr val="1C1C1C"/>
-                </a:solidFill>
-                <a:latin typeface="Roboto Condensed" pitchFamily="34" charset="0"/>
-                <a:ea typeface="Roboto Condensed" pitchFamily="34" charset="-122"/>
-                <a:cs typeface="Roboto Condensed" pitchFamily="34" charset="-120"/>
-              </a:rPr>
-              <a:t> file sits at the root of a site and tells automated programs which paths are allowed, which are off-limits, and how fast to go.</a:t>
+              <a:t>A robots.txt file tells automated programs which paths they may visit and how fast they may go. Any program that reads it is expected to follow it.</a:t>
             </a:r>
             <a:endParaRPr lang="en-US" sz="1450" dirty="0"/>
           </a:p>
@@ -3556,164 +3926,14 @@
       </p:sp>
       <p:sp>
         <p:nvSpPr>
-          <p:cNvPr id="4" name="Text 2"/>
-          <p:cNvSpPr/>
-          <p:nvPr/>
-        </p:nvSpPr>
-        <p:spPr>
-          <a:xfrm>
-            <a:off x="661475" y="3869234"/>
-            <a:ext cx="5203794" cy="1058466"/>
-          </a:xfrm>
-          <a:prstGeom prst="rect">
-            <a:avLst/>
-          </a:prstGeom>
-          <a:noFill/>
-          <a:ln/>
-        </p:spPr>
-        <p:txBody>
-          <a:bodyPr wrap="square" lIns="0" tIns="0" rIns="0" bIns="0" rtlCol="0" anchor="t">
-            <a:normAutofit/>
-          </a:bodyPr>
-          <a:lstStyle/>
-          <a:p>
-            <a:pPr algn="l" marL="294640" indent="-294640">
-              <a:lnSpc>
-                <a:spcPct val="133000"/>
-              </a:lnSpc>
-              <a:buSzPct val="100000"/>
-              <a:buChar char="•"/>
-            </a:pPr>
-            <a:r>
-              <a:rPr lang="en-US" sz="1450" dirty="0">
-                <a:solidFill>
-                  <a:srgbClr val="1C1C1C"/>
-                </a:solidFill>
-                <a:highlight>
-                  <a:srgbClr val="F2F2F2"/>
-                </a:highlight>
-                <a:latin typeface="Consolas" pitchFamily="34" charset="0"/>
-                <a:ea typeface="Consolas" pitchFamily="34" charset="-122"/>
-                <a:cs typeface="Consolas" pitchFamily="34" charset="-120"/>
-              </a:rPr>
-              <a:t>User-agent: *</a:t>
-            </a:r>
-            <a:pPr algn="l" marL="294640" indent="-294640">
-              <a:lnSpc>
-                <a:spcPct val="133000"/>
-              </a:lnSpc>
-              <a:buSzPct val="100000"/>
-              <a:buChar char="•"/>
-            </a:pPr>
-            <a:r>
-              <a:rPr lang="en-US" sz="1450" dirty="0">
-                <a:solidFill>
-                  <a:srgbClr val="1C1C1C"/>
-                </a:solidFill>
-                <a:latin typeface="Roboto Condensed" pitchFamily="34" charset="0"/>
-                <a:ea typeface="Roboto Condensed" pitchFamily="34" charset="-122"/>
-                <a:cs typeface="Roboto Condensed" pitchFamily="34" charset="-120"/>
-              </a:rPr>
-              <a:t> applies to all programs</a:t>
-            </a:r>
-            <a:endParaRPr lang="en-US" sz="1450" dirty="0"/>
-          </a:p>
-          <a:p>
-            <a:pPr algn="l" marL="294640" indent="-294640">
-              <a:lnSpc>
-                <a:spcPct val="133000"/>
-              </a:lnSpc>
-              <a:buSzPct val="100000"/>
-              <a:buChar char="•"/>
-            </a:pPr>
-            <a:r>
-              <a:rPr lang="en-US" sz="1450" dirty="0">
-                <a:solidFill>
-                  <a:srgbClr val="1C1C1C"/>
-                </a:solidFill>
-                <a:highlight>
-                  <a:srgbClr val="F2F2F2"/>
-                </a:highlight>
-                <a:latin typeface="Consolas" pitchFamily="34" charset="0"/>
-                <a:ea typeface="Consolas" pitchFamily="34" charset="-122"/>
-                <a:cs typeface="Consolas" pitchFamily="34" charset="-120"/>
-              </a:rPr>
-              <a:t>Crawl-delay</a:t>
-            </a:r>
-            <a:pPr algn="l" marL="294640" indent="-294640">
-              <a:lnSpc>
-                <a:spcPct val="133000"/>
-              </a:lnSpc>
-              <a:buSzPct val="100000"/>
-              <a:buChar char="•"/>
-            </a:pPr>
-            <a:r>
-              <a:rPr lang="en-US" sz="1450" dirty="0">
-                <a:solidFill>
-                  <a:srgbClr val="1C1C1C"/>
-                </a:solidFill>
-                <a:latin typeface="Roboto Condensed" pitchFamily="34" charset="0"/>
-                <a:ea typeface="Roboto Condensed" pitchFamily="34" charset="-122"/>
-                <a:cs typeface="Roboto Condensed" pitchFamily="34" charset="-120"/>
-              </a:rPr>
-              <a:t> sets the minimum wait in seconds</a:t>
-            </a:r>
-            <a:endParaRPr lang="en-US" sz="1450" dirty="0"/>
-          </a:p>
-          <a:p>
-            <a:pPr algn="l" marL="294640" indent="-294640">
-              <a:lnSpc>
-                <a:spcPct val="133000"/>
-              </a:lnSpc>
-              <a:buSzPct val="100000"/>
-              <a:buChar char="•"/>
-            </a:pPr>
-            <a:r>
-              <a:rPr lang="en-US" sz="1450" dirty="0">
-                <a:solidFill>
-                  <a:srgbClr val="1C1C1C"/>
-                </a:solidFill>
-                <a:highlight>
-                  <a:srgbClr val="F2F2F2"/>
-                </a:highlight>
-                <a:latin typeface="Consolas" pitchFamily="34" charset="0"/>
-                <a:ea typeface="Consolas" pitchFamily="34" charset="-122"/>
-                <a:cs typeface="Consolas" pitchFamily="34" charset="-120"/>
-              </a:rPr>
-              <a:t>Disallow</a:t>
-            </a:r>
-            <a:pPr algn="l" marL="294640" indent="-294640">
-              <a:lnSpc>
-                <a:spcPct val="133000"/>
-              </a:lnSpc>
-              <a:buSzPct val="100000"/>
-              <a:buChar char="•"/>
-            </a:pPr>
-            <a:r>
-              <a:rPr lang="en-US" sz="1450" dirty="0">
-                <a:solidFill>
-                  <a:srgbClr val="1C1C1C"/>
-                </a:solidFill>
-                <a:latin typeface="Roboto Condensed" pitchFamily="34" charset="0"/>
-                <a:ea typeface="Roboto Condensed" pitchFamily="34" charset="-122"/>
-                <a:cs typeface="Roboto Condensed" pitchFamily="34" charset="-120"/>
-              </a:rPr>
-              <a:t> marks paths that are off-limits</a:t>
-            </a:r>
-            <a:endParaRPr lang="en-US" sz="1450" dirty="0"/>
-          </a:p>
-        </p:txBody>
-      </p:sp>
-      <p:sp>
-        <p:nvSpPr>
-          <p:cNvPr id="5" name="Shape 3"/>
-          <p:cNvSpPr/>
-          <p:nvPr/>
-        </p:nvSpPr>
-        <p:spPr>
-          <a:xfrm>
-            <a:off x="6332776" y="2828131"/>
-            <a:ext cx="5203794" cy="1587698"/>
+          <p:cNvPr id="5" name="Shape 2"/>
+          <p:cNvSpPr/>
+          <p:nvPr/>
+        </p:nvSpPr>
+        <p:spPr>
+          <a:xfrm>
+            <a:off x="8032251" y="3700562"/>
+            <a:ext cx="3504219" cy="1587698"/>
           </a:xfrm>
           <a:prstGeom prst="roundRect">
             <a:avLst>
@@ -3728,14 +3948,14 @@
       </p:sp>
       <p:sp>
         <p:nvSpPr>
-          <p:cNvPr id="6" name="Text 4"/>
-          <p:cNvSpPr/>
-          <p:nvPr/>
-        </p:nvSpPr>
-        <p:spPr>
-          <a:xfrm>
-            <a:off x="6559584" y="3017143"/>
-            <a:ext cx="4750177" cy="1209675"/>
+          <p:cNvPr id="6" name="Text 3"/>
+          <p:cNvSpPr/>
+          <p:nvPr/>
+        </p:nvSpPr>
+        <p:spPr>
+          <a:xfrm>
+            <a:off x="8259060" y="3889573"/>
+            <a:ext cx="3050603" cy="1209675"/>
           </a:xfrm>
           <a:prstGeom prst="rect">
             <a:avLst/>
@@ -3832,7 +4052,7 @@
       </p:sp>
       <p:sp>
         <p:nvSpPr>
-          <p:cNvPr id="7" name="Text 5"/>
+          <p:cNvPr id="7" name="Text 4"/>
           <p:cNvSpPr/>
           <p:nvPr/>
         </p:nvSpPr>
@@ -4630,7 +4850,7 @@
         </p:nvSpPr>
         <p:spPr>
           <a:xfrm>
-            <a:off x="661475" y="1175048"/>
+            <a:off x="661475" y="856159"/>
             <a:ext cx="10868745" cy="590649"/>
           </a:xfrm>
           <a:prstGeom prst="rect">
@@ -4672,8 +4892,8 @@
         </p:nvSpPr>
         <p:spPr>
           <a:xfrm>
-            <a:off x="661475" y="2261791"/>
-            <a:ext cx="5203794" cy="2192536"/>
+            <a:off x="661475" y="1824831"/>
+            <a:ext cx="10868745" cy="2192536"/>
           </a:xfrm>
           <a:prstGeom prst="roundRect">
             <a:avLst>
@@ -4694,8 +4914,8 @@
         </p:nvSpPr>
         <p:spPr>
           <a:xfrm>
-            <a:off x="888283" y="2450802"/>
-            <a:ext cx="4750177" cy="1814513"/>
+            <a:off x="888283" y="2013843"/>
+            <a:ext cx="10415129" cy="1814513"/>
           </a:xfrm>
           <a:prstGeom prst="rect">
             <a:avLst/>
@@ -4744,7 +4964,7 @@
                 <a:ea typeface="Consolas" pitchFamily="34" charset="-122"/>
                 <a:cs typeface="Consolas" pitchFamily="34" charset="-120"/>
               </a:rPr>
-              <a:t>for chunk in page_text.split("&lt;td&gt;")[1:]:</a:t>
+              <a:t>for chunk in page_text.split("")[1:]:</a:t>
             </a:r>
             <a:endParaRPr lang="en-US" sz="1450" dirty="0"/>
           </a:p>
@@ -4764,7 +4984,7 @@
                 <a:ea typeface="Consolas" pitchFamily="34" charset="-122"/>
                 <a:cs typeface="Consolas" pitchFamily="34" charset="-120"/>
               </a:rPr>
-              <a:t>    cell = chunk.split("&lt;/td&gt;")[0]</a:t>
+              <a:t>    cell = chunk.split("")[0]</a:t>
             </a:r>
             <a:endParaRPr lang="en-US" sz="1450" dirty="0"/>
           </a:p>
@@ -4838,8 +5058,8 @@
         </p:nvSpPr>
         <p:spPr>
           <a:xfrm>
-            <a:off x="661475" y="4666952"/>
-            <a:ext cx="5203794" cy="680442"/>
+            <a:off x="661475" y="4229993"/>
+            <a:ext cx="10868745" cy="680442"/>
           </a:xfrm>
           <a:prstGeom prst="roundRect">
             <a:avLst>
@@ -4860,8 +5080,8 @@
         </p:nvSpPr>
         <p:spPr>
           <a:xfrm>
-            <a:off x="888283" y="4855964"/>
-            <a:ext cx="5359762" cy="302419"/>
+            <a:off x="888283" y="4419005"/>
+            <a:ext cx="11024713" cy="302419"/>
           </a:xfrm>
           <a:prstGeom prst="rect">
             <a:avLst/>
@@ -4896,14 +5116,60 @@
       </p:sp>
       <p:sp>
         <p:nvSpPr>
-          <p:cNvPr id="7" name="Text 5"/>
-          <p:cNvSpPr/>
-          <p:nvPr/>
-        </p:nvSpPr>
-        <p:spPr>
-          <a:xfrm>
-            <a:off x="6332776" y="2238177"/>
-            <a:ext cx="5203794" cy="295275"/>
+          <p:cNvPr id="7" name="Shape 5"/>
+          <p:cNvSpPr/>
+          <p:nvPr/>
+        </p:nvSpPr>
+        <p:spPr>
+          <a:xfrm>
+            <a:off x="661475" y="5123061"/>
+            <a:ext cx="10868745" cy="755948"/>
+          </a:xfrm>
+          <a:prstGeom prst="roundRect">
+            <a:avLst>
+              <a:gd name="adj" fmla="val 10502"/>
+            </a:avLst>
+          </a:prstGeom>
+          <a:solidFill>
+            <a:srgbClr val="FCF2B5"/>
+          </a:solidFill>
+          <a:ln/>
+        </p:spPr>
+      </p:sp>
+      <p:pic>
+        <p:nvPicPr>
+          <p:cNvPr id="8" name="Image 0" descr="preencoded.png">    </p:cNvPr>
+          <p:cNvPicPr>
+            <a:picLocks noChangeAspect="1"/>
+          </p:cNvPicPr>
+          <p:nvPr/>
+        </p:nvPicPr>
+        <p:blipFill>
+          <a:blip r:embed="rId1"/>
+          <a:stretch>
+            <a:fillRect/>
+          </a:stretch>
+        </p:blipFill>
+        <p:spPr>
+          <a:xfrm>
+            <a:off x="850482" y="5390753"/>
+            <a:ext cx="236234" cy="189012"/>
+          </a:xfrm>
+          <a:prstGeom prst="rect">
+            <a:avLst/>
+          </a:prstGeom>
+        </p:spPr>
+      </p:pic>
+      <p:sp>
+        <p:nvSpPr>
+          <p:cNvPr id="9" name="Text 6"/>
+          <p:cNvSpPr/>
+          <p:nvPr/>
+        </p:nvSpPr>
+        <p:spPr>
+          <a:xfrm>
+            <a:off x="1275723" y="5359301"/>
+            <a:ext cx="10675075" cy="302419"/>
           </a:xfrm>
           <a:prstGeom prst="rect">
             <a:avLst/>
@@ -4917,50 +5183,6 @@
           <a:p>
             <a:pPr algn="l" indent="0" marL="0">
               <a:lnSpc>
-                <a:spcPct val="104000"/>
-              </a:lnSpc>
-              <a:buNone/>
-            </a:pPr>
-            <a:r>
-              <a:rPr lang="en-US" sz="1850" b="1" dirty="0">
-                <a:solidFill>
-                  <a:srgbClr val="111111"/>
-                </a:solidFill>
-                <a:latin typeface="Orbitron Bold" pitchFamily="34" charset="0"/>
-                <a:ea typeface="Orbitron Bold" pitchFamily="34" charset="-122"/>
-                <a:cs typeface="Orbitron Bold" pitchFamily="34" charset="-120"/>
-              </a:rPr>
-              <a:t>Why zero?</a:t>
-            </a:r>
-            <a:endParaRPr lang="en-US" sz="1850" dirty="0"/>
-          </a:p>
-        </p:txBody>
-      </p:sp>
-      <p:sp>
-        <p:nvSpPr>
-          <p:cNvPr id="8" name="Text 6"/>
-          <p:cNvSpPr/>
-          <p:nvPr/>
-        </p:nvSpPr>
-        <p:spPr>
-          <a:xfrm>
-            <a:off x="6332776" y="2722463"/>
-            <a:ext cx="5203794" cy="1518444"/>
-          </a:xfrm>
-          <a:prstGeom prst="rect">
-            <a:avLst/>
-          </a:prstGeom>
-          <a:noFill/>
-          <a:ln/>
-        </p:spPr>
-        <p:txBody>
-          <a:bodyPr wrap="square" lIns="0" tIns="0" rIns="0" bIns="0" rtlCol="0" anchor="t">
-            <a:normAutofit/>
-          </a:bodyPr>
-          <a:lstStyle/>
-          <a:p>
-            <a:pPr algn="l" indent="0" marL="0">
-              <a:lnSpc>
                 <a:spcPct val="133000"/>
               </a:lnSpc>
               <a:buNone/>
@@ -4968,50 +5190,13 @@
             <a:r>
               <a:rPr lang="en-US" sz="1450" dirty="0">
                 <a:solidFill>
-                  <a:srgbClr val="1C1C1C"/>
+                  <a:srgbClr val="000000"/>
                 </a:solidFill>
                 <a:latin typeface="Roboto Condensed" pitchFamily="34" charset="0"/>
                 <a:ea typeface="Roboto Condensed" pitchFamily="34" charset="-122"/>
                 <a:cs typeface="Roboto Condensed" pitchFamily="34" charset="-120"/>
               </a:rPr>
-              <a:t>The raw HTML uses lowercase </a:t>
-            </a:r>
-            <a:pPr algn="l" indent="0" marL="0">
-              <a:lnSpc>
-                <a:spcPct val="133000"/>
-              </a:lnSpc>
-              <a:buNone/>
-            </a:pPr>
-            <a:r>
-              <a:rPr lang="en-US" sz="1450" dirty="0">
-                <a:solidFill>
-                  <a:srgbClr val="1C1C1C"/>
-                </a:solidFill>
-                <a:highlight>
-                  <a:srgbClr val="F2F2F2"/>
-                </a:highlight>
-                <a:latin typeface="Consolas" pitchFamily="34" charset="0"/>
-                <a:ea typeface="Consolas" pitchFamily="34" charset="-122"/>
-                <a:cs typeface="Consolas" pitchFamily="34" charset="-120"/>
-              </a:rPr>
-              <a:t>&lt;td&gt;</a:t>
-            </a:r>
-            <a:pPr algn="l" indent="0" marL="0">
-              <a:lnSpc>
-                <a:spcPct val="133000"/>
-              </a:lnSpc>
-              <a:buNone/>
-            </a:pPr>
-            <a:r>
-              <a:rPr lang="en-US" sz="1450" dirty="0">
-                <a:solidFill>
-                  <a:srgbClr val="1C1C1C"/>
-                </a:solidFill>
-                <a:latin typeface="Roboto Condensed" pitchFamily="34" charset="0"/>
-                <a:ea typeface="Roboto Condensed" pitchFamily="34" charset="-122"/>
-                <a:cs typeface="Roboto Condensed" pitchFamily="34" charset="-120"/>
-              </a:rPr>
-              <a:t> tags, but the actual page may render differently depending on whitespace, attributes, or encoding. Splitting on raw tag strings is fragile and misses real data. A proper HTML parser handles these cases correctly.</a:t>
+              <a:t>Splitting on raw HTML tags misses prices when the markup uses attributes or whitespace. Use a proper parser instead.</a:t>
             </a:r>
             <a:endParaRPr lang="en-US" sz="1450" dirty="0"/>
           </a:p>
@@ -5019,7 +5204,7 @@
       </p:sp>
       <p:sp>
         <p:nvSpPr>
-          <p:cNvPr id="9" name="Text 7"/>
+          <p:cNvPr id="10" name="Text 7"/>
           <p:cNvSpPr/>
           <p:nvPr/>
         </p:nvSpPr>
@@ -5100,7 +5285,7 @@
         </p:blipFill>
         <p:spPr>
           <a:xfrm>
-            <a:off x="7619809" y="0"/>
+            <a:off x="0" y="0"/>
             <a:ext cx="4571886" cy="6858000"/>
           </a:xfrm>
           <a:prstGeom prst="rect">
@@ -5116,7 +5301,7 @@
         </p:nvSpPr>
         <p:spPr>
           <a:xfrm>
-            <a:off x="661475" y="1484709"/>
+            <a:off x="5233360" y="1484709"/>
             <a:ext cx="6296860" cy="1181298"/>
           </a:xfrm>
           <a:prstGeom prst="rect">
@@ -5160,7 +5345,7 @@
         </p:nvSpPr>
         <p:spPr>
           <a:xfrm>
-            <a:off x="661475" y="2949476"/>
+            <a:off x="5233360" y="2949476"/>
             <a:ext cx="6296860" cy="680442"/>
           </a:xfrm>
           <a:prstGeom prst="roundRect">
@@ -5182,7 +5367,7 @@
         </p:nvSpPr>
         <p:spPr>
           <a:xfrm>
-            <a:off x="888283" y="3138488"/>
+            <a:off x="5460169" y="3138488"/>
             <a:ext cx="6452828" cy="302419"/>
           </a:xfrm>
           <a:prstGeom prst="rect">
@@ -5224,7 +5409,7 @@
         </p:nvSpPr>
         <p:spPr>
           <a:xfrm>
-            <a:off x="661475" y="3842544"/>
+            <a:off x="5233360" y="3842544"/>
             <a:ext cx="6296860" cy="1407914"/>
           </a:xfrm>
           <a:prstGeom prst="rect">
@@ -5332,7 +5517,7 @@
         </p:nvSpPr>
         <p:spPr>
           <a:xfrm>
-            <a:off x="132255" y="6457255"/>
+            <a:off x="4704141" y="6457255"/>
             <a:ext cx="3640642" cy="158750"/>
           </a:xfrm>
           <a:prstGeom prst="rect">
